--- a/Atividade_8_Ingestao_ETL_Pipeline_Streaming_PySpark_Kafka/Atividade_8_Pipeline_Streaming_PySpark_Kafka_Apresentacao.pptx
+++ b/Atividade_8_Ingestao_ETL_Pipeline_Streaming_PySpark_Kafka/Atividade_8_Pipeline_Streaming_PySpark_Kafka_Apresentacao.pptx
@@ -3949,8 +3949,8 @@
         </p:nvSpPr>
         <p:spPr>
           <a:xfrm>
-            <a:off x="731520" y="5074920"/>
-            <a:ext cx="4163769" cy="538609"/>
+            <a:off x="731520" y="5074921"/>
+            <a:ext cx="10378440" cy="723275"/>
           </a:xfrm>
           <a:prstGeom prst="rect">
             <a:avLst/>
@@ -3958,7 +3958,7 @@
           <a:noFill/>
         </p:spPr>
         <p:txBody>
-          <a:bodyPr wrap="none">
+          <a:bodyPr wrap="square">
             <a:spAutoFit/>
           </a:bodyPr>
           <a:lstStyle/>
@@ -3998,6 +3998,36 @@
               </a:rPr>
               <a:t> de Dados + Big Data • Escola Politécnica da USP</a:t>
             </a:r>
+            <a:br>
+              <a:rPr lang="pt-BR" sz="1200" dirty="0">
+                <a:solidFill>
+                  <a:srgbClr val="CBD5E1"/>
+                </a:solidFill>
+                <a:latin typeface="Aptos"/>
+              </a:rPr>
+            </a:br>
+            <a:r>
+              <a:rPr lang="pt-BR" sz="1200" dirty="0">
+                <a:solidFill>
+                  <a:schemeClr val="bg1"/>
+                </a:solidFill>
+                <a:latin typeface="Aptos"/>
+                <a:hlinkClick r:id="rId2">
+                  <a:extLst>
+                    <a:ext uri="{A12FA001-AC4F-418D-AE19-62706E023703}">
+                      <ahyp:hlinkClr xmlns:ahyp="http://schemas.microsoft.com/office/drawing/2018/hyperlinkcolor" val="tx"/>
+                    </a:ext>
+                  </a:extLst>
+                </a:hlinkClick>
+              </a:rPr>
+              <a:t>https://github.com/EdCruzJunior/eEDB-022-2026-3-Ingestao_Pipeline_Dados/tree/main/Atividade_8_Ingestao_ETL_Pipeline_Streaming_PySpark_Kafka</a:t>
+            </a:r>
+            <a:endParaRPr sz="1200" dirty="0">
+              <a:solidFill>
+                <a:schemeClr val="bg1"/>
+              </a:solidFill>
+              <a:latin typeface="Aptos"/>
+            </a:endParaRPr>
           </a:p>
         </p:txBody>
       </p:sp>

--- a/Atividade_8_Ingestao_ETL_Pipeline_Streaming_PySpark_Kafka/Atividade_8_Pipeline_Streaming_PySpark_Kafka_Apresentacao.pptx
+++ b/Atividade_8_Ingestao_ETL_Pipeline_Streaming_PySpark_Kafka/Atividade_8_Pipeline_Streaming_PySpark_Kafka_Apresentacao.pptx
@@ -19,7 +19,8 @@
     <p:sldId id="267" r:id="rId13"/>
     <p:sldId id="268" r:id="rId14"/>
     <p:sldId id="269" r:id="rId15"/>
-    <p:sldId id="270" r:id="rId16"/>
+    <p:sldId id="271" r:id="rId16"/>
+    <p:sldId id="270" r:id="rId17"/>
   </p:sldIdLst>
   <p:sldSz cx="12192000" cy="6858000"/>
   <p:notesSz cx="6858000" cy="9144000"/>
@@ -7539,6 +7540,367 @@
   <p:cSld>
     <p:spTree>
       <p:nvGrpSpPr>
+        <p:cNvPr id="1" name="">
+          <a:extLst>
+            <a:ext uri="{FF2B5EF4-FFF2-40B4-BE49-F238E27FC236}">
+              <a16:creationId xmlns:a16="http://schemas.microsoft.com/office/drawing/2014/main" id="{9B4C51E1-4089-64F1-9813-3C059FE74714}"/>
+            </a:ext>
+          </a:extLst>
+        </p:cNvPr>
+        <p:cNvGrpSpPr/>
+        <p:nvPr/>
+      </p:nvGrpSpPr>
+      <p:grpSpPr>
+        <a:xfrm>
+          <a:off x="0" y="0"/>
+          <a:ext cx="0" cy="0"/>
+          <a:chOff x="0" y="0"/>
+          <a:chExt cx="0" cy="0"/>
+        </a:xfrm>
+      </p:grpSpPr>
+      <p:sp>
+        <p:nvSpPr>
+          <p:cNvPr id="2" name="Rectangle 1">
+            <a:extLst>
+              <a:ext uri="{FF2B5EF4-FFF2-40B4-BE49-F238E27FC236}">
+                <a16:creationId xmlns:a16="http://schemas.microsoft.com/office/drawing/2014/main" id="{15CCEC6C-36A6-A936-5CFC-2BC5CC89D6C0}"/>
+              </a:ext>
+            </a:extLst>
+          </p:cNvPr>
+          <p:cNvSpPr/>
+          <p:nvPr/>
+        </p:nvSpPr>
+        <p:spPr>
+          <a:xfrm>
+            <a:off x="0" y="0"/>
+            <a:ext cx="12191999" cy="6858000"/>
+          </a:xfrm>
+          <a:prstGeom prst="rect">
+            <a:avLst/>
+          </a:prstGeom>
+          <a:solidFill>
+            <a:schemeClr val="bg1"/>
+          </a:solidFill>
+          <a:ln>
+            <a:noFill/>
+          </a:ln>
+        </p:spPr>
+        <p:style>
+          <a:lnRef idx="1">
+            <a:schemeClr val="accent1"/>
+          </a:lnRef>
+          <a:fillRef idx="3">
+            <a:schemeClr val="accent1"/>
+          </a:fillRef>
+          <a:effectRef idx="2">
+            <a:schemeClr val="accent1"/>
+          </a:effectRef>
+          <a:fontRef idx="minor">
+            <a:schemeClr val="lt1"/>
+          </a:fontRef>
+        </p:style>
+        <p:txBody>
+          <a:bodyPr rtlCol="0" anchor="ctr"/>
+          <a:lstStyle/>
+          <a:p>
+            <a:pPr algn="ctr"/>
+            <a:endParaRPr/>
+          </a:p>
+        </p:txBody>
+      </p:sp>
+      <p:sp>
+        <p:nvSpPr>
+          <p:cNvPr id="3" name="Rectangle 2">
+            <a:extLst>
+              <a:ext uri="{FF2B5EF4-FFF2-40B4-BE49-F238E27FC236}">
+                <a16:creationId xmlns:a16="http://schemas.microsoft.com/office/drawing/2014/main" id="{FABAABC3-CFE5-88D4-D206-AB70D8FF183F}"/>
+              </a:ext>
+            </a:extLst>
+          </p:cNvPr>
+          <p:cNvSpPr/>
+          <p:nvPr/>
+        </p:nvSpPr>
+        <p:spPr>
+          <a:xfrm>
+            <a:off x="0" y="0"/>
+            <a:ext cx="12191999" cy="109728"/>
+          </a:xfrm>
+          <a:prstGeom prst="rect">
+            <a:avLst/>
+          </a:prstGeom>
+          <a:solidFill>
+            <a:srgbClr val="2563EB"/>
+          </a:solidFill>
+          <a:ln>
+            <a:noFill/>
+          </a:ln>
+        </p:spPr>
+        <p:style>
+          <a:lnRef idx="1">
+            <a:schemeClr val="accent1"/>
+          </a:lnRef>
+          <a:fillRef idx="3">
+            <a:schemeClr val="accent1"/>
+          </a:fillRef>
+          <a:effectRef idx="2">
+            <a:schemeClr val="accent1"/>
+          </a:effectRef>
+          <a:fontRef idx="minor">
+            <a:schemeClr val="lt1"/>
+          </a:fontRef>
+        </p:style>
+        <p:txBody>
+          <a:bodyPr rtlCol="0" anchor="ctr"/>
+          <a:lstStyle/>
+          <a:p>
+            <a:pPr algn="ctr"/>
+            <a:endParaRPr/>
+          </a:p>
+        </p:txBody>
+      </p:sp>
+      <p:sp>
+        <p:nvSpPr>
+          <p:cNvPr id="4" name="TextBox 3">
+            <a:extLst>
+              <a:ext uri="{FF2B5EF4-FFF2-40B4-BE49-F238E27FC236}">
+                <a16:creationId xmlns:a16="http://schemas.microsoft.com/office/drawing/2014/main" id="{36DE4232-741C-292A-5A1A-276524EA3E75}"/>
+              </a:ext>
+            </a:extLst>
+          </p:cNvPr>
+          <p:cNvSpPr txBox="1"/>
+          <p:nvPr/>
+        </p:nvSpPr>
+        <p:spPr>
+          <a:xfrm>
+            <a:off x="594360" y="320040"/>
+            <a:ext cx="689612" cy="477054"/>
+          </a:xfrm>
+          <a:prstGeom prst="rect">
+            <a:avLst/>
+          </a:prstGeom>
+          <a:noFill/>
+        </p:spPr>
+        <p:txBody>
+          <a:bodyPr wrap="none">
+            <a:spAutoFit/>
+          </a:bodyPr>
+          <a:lstStyle/>
+          <a:p>
+            <a:r>
+              <a:rPr sz="2500" b="1" dirty="0">
+                <a:solidFill>
+                  <a:srgbClr val="0F172A"/>
+                </a:solidFill>
+                <a:latin typeface="Aptos"/>
+              </a:rPr>
+              <a:t>1</a:t>
+            </a:r>
+            <a:r>
+              <a:rPr lang="pt-BR" sz="2500" b="1" dirty="0">
+                <a:solidFill>
+                  <a:srgbClr val="0F172A"/>
+                </a:solidFill>
+                <a:latin typeface="Aptos"/>
+              </a:rPr>
+              <a:t>4</a:t>
+            </a:r>
+            <a:r>
+              <a:rPr sz="2500" b="1" dirty="0">
+                <a:solidFill>
+                  <a:srgbClr val="0F172A"/>
+                </a:solidFill>
+                <a:latin typeface="Aptos"/>
+              </a:rPr>
+              <a:t>. </a:t>
+            </a:r>
+          </a:p>
+        </p:txBody>
+      </p:sp>
+      <p:sp>
+        <p:nvSpPr>
+          <p:cNvPr id="16" name="Rectangle 15">
+            <a:extLst>
+              <a:ext uri="{FF2B5EF4-FFF2-40B4-BE49-F238E27FC236}">
+                <a16:creationId xmlns:a16="http://schemas.microsoft.com/office/drawing/2014/main" id="{5B3642FE-2401-9BC9-84A4-651223665ABB}"/>
+              </a:ext>
+            </a:extLst>
+          </p:cNvPr>
+          <p:cNvSpPr/>
+          <p:nvPr/>
+        </p:nvSpPr>
+        <p:spPr>
+          <a:xfrm>
+            <a:off x="594360" y="6473952"/>
+            <a:ext cx="10972800" cy="9144"/>
+          </a:xfrm>
+          <a:prstGeom prst="rect">
+            <a:avLst/>
+          </a:prstGeom>
+          <a:solidFill>
+            <a:srgbClr val="E2E8F0"/>
+          </a:solidFill>
+          <a:ln>
+            <a:noFill/>
+          </a:ln>
+        </p:spPr>
+        <p:style>
+          <a:lnRef idx="1">
+            <a:schemeClr val="accent1"/>
+          </a:lnRef>
+          <a:fillRef idx="3">
+            <a:schemeClr val="accent1"/>
+          </a:fillRef>
+          <a:effectRef idx="2">
+            <a:schemeClr val="accent1"/>
+          </a:effectRef>
+          <a:fontRef idx="minor">
+            <a:schemeClr val="lt1"/>
+          </a:fontRef>
+        </p:style>
+        <p:txBody>
+          <a:bodyPr rtlCol="0" anchor="ctr"/>
+          <a:lstStyle/>
+          <a:p>
+            <a:pPr algn="ctr"/>
+            <a:endParaRPr/>
+          </a:p>
+        </p:txBody>
+      </p:sp>
+      <p:sp>
+        <p:nvSpPr>
+          <p:cNvPr id="17" name="TextBox 16">
+            <a:extLst>
+              <a:ext uri="{FF2B5EF4-FFF2-40B4-BE49-F238E27FC236}">
+                <a16:creationId xmlns:a16="http://schemas.microsoft.com/office/drawing/2014/main" id="{E17734FA-4823-3BAF-0B2F-57D3C07BCF92}"/>
+              </a:ext>
+            </a:extLst>
+          </p:cNvPr>
+          <p:cNvSpPr txBox="1"/>
+          <p:nvPr/>
+        </p:nvSpPr>
+        <p:spPr>
+          <a:xfrm>
+            <a:off x="594360" y="6510528"/>
+            <a:ext cx="9784080" cy="201168"/>
+          </a:xfrm>
+          <a:prstGeom prst="rect">
+            <a:avLst/>
+          </a:prstGeom>
+          <a:noFill/>
+        </p:spPr>
+        <p:txBody>
+          <a:bodyPr wrap="none">
+            <a:spAutoFit/>
+          </a:bodyPr>
+          <a:lstStyle/>
+          <a:p>
+            <a:r>
+              <a:rPr sz="800">
+                <a:solidFill>
+                  <a:srgbClr val="64748B"/>
+                </a:solidFill>
+                <a:latin typeface="Aptos"/>
+              </a:rPr>
+              <a:t>Engenharia de Dados + Big Data • eEDB-022/2026-3</a:t>
+            </a:r>
+          </a:p>
+        </p:txBody>
+      </p:sp>
+      <p:sp>
+        <p:nvSpPr>
+          <p:cNvPr id="18" name="TextBox 17">
+            <a:extLst>
+              <a:ext uri="{FF2B5EF4-FFF2-40B4-BE49-F238E27FC236}">
+                <a16:creationId xmlns:a16="http://schemas.microsoft.com/office/drawing/2014/main" id="{806FDD5D-8250-0AC5-61EB-C13C5DA78940}"/>
+              </a:ext>
+            </a:extLst>
+          </p:cNvPr>
+          <p:cNvSpPr txBox="1"/>
+          <p:nvPr/>
+        </p:nvSpPr>
+        <p:spPr>
+          <a:xfrm>
+            <a:off x="11260665" y="6492240"/>
+            <a:ext cx="306495" cy="230832"/>
+          </a:xfrm>
+          <a:prstGeom prst="rect">
+            <a:avLst/>
+          </a:prstGeom>
+          <a:noFill/>
+        </p:spPr>
+        <p:txBody>
+          <a:bodyPr wrap="none">
+            <a:spAutoFit/>
+          </a:bodyPr>
+          <a:lstStyle/>
+          <a:p>
+            <a:pPr algn="r"/>
+            <a:r>
+              <a:rPr lang="pt-BR" sz="900" b="1" dirty="0">
+                <a:solidFill>
+                  <a:srgbClr val="475569"/>
+                </a:solidFill>
+                <a:latin typeface="Aptos"/>
+              </a:rPr>
+              <a:t>15</a:t>
+            </a:r>
+            <a:endParaRPr sz="900" b="1" dirty="0">
+              <a:solidFill>
+                <a:srgbClr val="475569"/>
+              </a:solidFill>
+              <a:latin typeface="Aptos"/>
+            </a:endParaRPr>
+          </a:p>
+        </p:txBody>
+      </p:sp>
+      <p:pic>
+        <p:nvPicPr>
+          <p:cNvPr id="13" name="Imagem 12">
+            <a:extLst>
+              <a:ext uri="{FF2B5EF4-FFF2-40B4-BE49-F238E27FC236}">
+                <a16:creationId xmlns:a16="http://schemas.microsoft.com/office/drawing/2014/main" id="{DF1D8EA8-037A-994D-8458-AAF2CCE84BE5}"/>
+              </a:ext>
+            </a:extLst>
+          </p:cNvPr>
+          <p:cNvPicPr>
+            <a:picLocks noChangeAspect="1"/>
+          </p:cNvPicPr>
+          <p:nvPr/>
+        </p:nvPicPr>
+        <p:blipFill>
+          <a:blip r:embed="rId2"/>
+          <a:stretch>
+            <a:fillRect/>
+          </a:stretch>
+        </p:blipFill>
+        <p:spPr>
+          <a:xfrm>
+            <a:off x="1142999" y="355917"/>
+            <a:ext cx="10230121" cy="5742902"/>
+          </a:xfrm>
+          <a:prstGeom prst="rect">
+            <a:avLst/>
+          </a:prstGeom>
+        </p:spPr>
+      </p:pic>
+    </p:spTree>
+    <p:extLst>
+      <p:ext uri="{BB962C8B-B14F-4D97-AF65-F5344CB8AC3E}">
+        <p14:creationId xmlns:p14="http://schemas.microsoft.com/office/powerpoint/2010/main" val="1769297370"/>
+      </p:ext>
+    </p:extLst>
+  </p:cSld>
+  <p:clrMapOvr>
+    <a:masterClrMapping/>
+  </p:clrMapOvr>
+</p:sld>
+</file>
+
+<file path=ppt/slides/slide16.xml><?xml version="1.0" encoding="utf-8"?>
+<p:sld xmlns:a="http://schemas.openxmlformats.org/drawingml/2006/main" xmlns:r="http://schemas.openxmlformats.org/officeDocument/2006/relationships" xmlns:p="http://schemas.openxmlformats.org/presentationml/2006/main">
+  <p:cSld>
+    <p:spTree>
+      <p:nvGrpSpPr>
         <p:cNvPr id="1" name=""/>
         <p:cNvGrpSpPr/>
         <p:nvPr/>
@@ -7648,7 +8010,7 @@
         <p:spPr>
           <a:xfrm>
             <a:off x="594360" y="320040"/>
-            <a:ext cx="10789920" cy="502920"/>
+            <a:ext cx="2268570" cy="477054"/>
           </a:xfrm>
           <a:prstGeom prst="rect">
             <a:avLst/>
@@ -7662,14 +8024,47 @@
           <a:lstStyle/>
           <a:p>
             <a:r>
-              <a:rPr sz="2500" b="1">
+              <a:rPr sz="2500" b="1" dirty="0">
                 <a:solidFill>
                   <a:srgbClr val="0F172A"/>
                 </a:solidFill>
                 <a:latin typeface="Aptos"/>
               </a:rPr>
-              <a:t>14. Conclusão</a:t>
-            </a:r>
+              <a:t>1</a:t>
+            </a:r>
+            <a:r>
+              <a:rPr lang="pt-BR" sz="2500" b="1" dirty="0">
+                <a:solidFill>
+                  <a:srgbClr val="0F172A"/>
+                </a:solidFill>
+                <a:latin typeface="Aptos"/>
+              </a:rPr>
+              <a:t>5</a:t>
+            </a:r>
+            <a:r>
+              <a:rPr sz="2500" b="1" dirty="0">
+                <a:solidFill>
+                  <a:srgbClr val="0F172A"/>
+                </a:solidFill>
+                <a:latin typeface="Aptos"/>
+              </a:rPr>
+              <a:t>. </a:t>
+            </a:r>
+            <a:r>
+              <a:rPr sz="2500" b="1" dirty="0" err="1">
+                <a:solidFill>
+                  <a:srgbClr val="0F172A"/>
+                </a:solidFill>
+                <a:latin typeface="Aptos"/>
+              </a:rPr>
+              <a:t>Conclusão</a:t>
+            </a:r>
+            <a:endParaRPr sz="2500" b="1" dirty="0">
+              <a:solidFill>
+                <a:srgbClr val="0F172A"/>
+              </a:solidFill>
+              <a:latin typeface="Aptos"/>
+            </a:endParaRPr>
           </a:p>
         </p:txBody>
       </p:sp>
@@ -8032,8 +8427,8 @@
         </p:nvSpPr>
         <p:spPr>
           <a:xfrm>
-            <a:off x="10789920" y="6492240"/>
-            <a:ext cx="777240" cy="228600"/>
+            <a:off x="11260665" y="6492240"/>
+            <a:ext cx="306495" cy="230832"/>
           </a:xfrm>
           <a:prstGeom prst="rect">
             <a:avLst/>
@@ -8048,14 +8443,20 @@
           <a:p>
             <a:pPr algn="r"/>
             <a:r>
-              <a:rPr sz="900" b="1">
+              <a:rPr lang="pt-BR" sz="900" b="1" dirty="0">
                 <a:solidFill>
                   <a:srgbClr val="475569"/>
                 </a:solidFill>
                 <a:latin typeface="Aptos"/>
               </a:rPr>
-              <a:t>15</a:t>
-            </a:r>
+              <a:t>16</a:t>
+            </a:r>
+            <a:endParaRPr sz="900" b="1" dirty="0">
+              <a:solidFill>
+                <a:srgbClr val="475569"/>
+              </a:solidFill>
+              <a:latin typeface="Aptos"/>
+            </a:endParaRPr>
           </a:p>
         </p:txBody>
       </p:sp>

--- a/Atividade_8_Ingestao_ETL_Pipeline_Streaming_PySpark_Kafka/Atividade_8_Pipeline_Streaming_PySpark_Kafka_Apresentacao.pptx
+++ b/Atividade_8_Ingestao_ETL_Pipeline_Streaming_PySpark_Kafka/Atividade_8_Pipeline_Streaming_PySpark_Kafka_Apresentacao.pptx
@@ -20,7 +20,8 @@
     <p:sldId id="268" r:id="rId14"/>
     <p:sldId id="269" r:id="rId15"/>
     <p:sldId id="271" r:id="rId16"/>
-    <p:sldId id="270" r:id="rId17"/>
+    <p:sldId id="272" r:id="rId17"/>
+    <p:sldId id="270" r:id="rId18"/>
   </p:sldIdLst>
   <p:sldSz cx="12192000" cy="6858000"/>
   <p:notesSz cx="6858000" cy="9144000"/>
@@ -7901,6 +7902,367 @@
   <p:cSld>
     <p:spTree>
       <p:nvGrpSpPr>
+        <p:cNvPr id="1" name="">
+          <a:extLst>
+            <a:ext uri="{FF2B5EF4-FFF2-40B4-BE49-F238E27FC236}">
+              <a16:creationId xmlns:a16="http://schemas.microsoft.com/office/drawing/2014/main" id="{4279D437-3878-3414-D8A2-562E80A94DAB}"/>
+            </a:ext>
+          </a:extLst>
+        </p:cNvPr>
+        <p:cNvGrpSpPr/>
+        <p:nvPr/>
+      </p:nvGrpSpPr>
+      <p:grpSpPr>
+        <a:xfrm>
+          <a:off x="0" y="0"/>
+          <a:ext cx="0" cy="0"/>
+          <a:chOff x="0" y="0"/>
+          <a:chExt cx="0" cy="0"/>
+        </a:xfrm>
+      </p:grpSpPr>
+      <p:sp>
+        <p:nvSpPr>
+          <p:cNvPr id="2" name="Rectangle 1">
+            <a:extLst>
+              <a:ext uri="{FF2B5EF4-FFF2-40B4-BE49-F238E27FC236}">
+                <a16:creationId xmlns:a16="http://schemas.microsoft.com/office/drawing/2014/main" id="{FE358080-7F80-FB6C-EF0C-1F0F868A265F}"/>
+              </a:ext>
+            </a:extLst>
+          </p:cNvPr>
+          <p:cNvSpPr/>
+          <p:nvPr/>
+        </p:nvSpPr>
+        <p:spPr>
+          <a:xfrm>
+            <a:off x="0" y="0"/>
+            <a:ext cx="12191999" cy="6858000"/>
+          </a:xfrm>
+          <a:prstGeom prst="rect">
+            <a:avLst/>
+          </a:prstGeom>
+          <a:solidFill>
+            <a:schemeClr val="bg1"/>
+          </a:solidFill>
+          <a:ln>
+            <a:noFill/>
+          </a:ln>
+        </p:spPr>
+        <p:style>
+          <a:lnRef idx="1">
+            <a:schemeClr val="accent1"/>
+          </a:lnRef>
+          <a:fillRef idx="3">
+            <a:schemeClr val="accent1"/>
+          </a:fillRef>
+          <a:effectRef idx="2">
+            <a:schemeClr val="accent1"/>
+          </a:effectRef>
+          <a:fontRef idx="minor">
+            <a:schemeClr val="lt1"/>
+          </a:fontRef>
+        </p:style>
+        <p:txBody>
+          <a:bodyPr rtlCol="0" anchor="ctr"/>
+          <a:lstStyle/>
+          <a:p>
+            <a:pPr algn="ctr"/>
+            <a:endParaRPr/>
+          </a:p>
+        </p:txBody>
+      </p:sp>
+      <p:sp>
+        <p:nvSpPr>
+          <p:cNvPr id="3" name="Rectangle 2">
+            <a:extLst>
+              <a:ext uri="{FF2B5EF4-FFF2-40B4-BE49-F238E27FC236}">
+                <a16:creationId xmlns:a16="http://schemas.microsoft.com/office/drawing/2014/main" id="{3AF5C2A6-1BBD-4B33-8324-2A982BA2B5C2}"/>
+              </a:ext>
+            </a:extLst>
+          </p:cNvPr>
+          <p:cNvSpPr/>
+          <p:nvPr/>
+        </p:nvSpPr>
+        <p:spPr>
+          <a:xfrm>
+            <a:off x="0" y="0"/>
+            <a:ext cx="12191999" cy="109728"/>
+          </a:xfrm>
+          <a:prstGeom prst="rect">
+            <a:avLst/>
+          </a:prstGeom>
+          <a:solidFill>
+            <a:srgbClr val="2563EB"/>
+          </a:solidFill>
+          <a:ln>
+            <a:noFill/>
+          </a:ln>
+        </p:spPr>
+        <p:style>
+          <a:lnRef idx="1">
+            <a:schemeClr val="accent1"/>
+          </a:lnRef>
+          <a:fillRef idx="3">
+            <a:schemeClr val="accent1"/>
+          </a:fillRef>
+          <a:effectRef idx="2">
+            <a:schemeClr val="accent1"/>
+          </a:effectRef>
+          <a:fontRef idx="minor">
+            <a:schemeClr val="lt1"/>
+          </a:fontRef>
+        </p:style>
+        <p:txBody>
+          <a:bodyPr rtlCol="0" anchor="ctr"/>
+          <a:lstStyle/>
+          <a:p>
+            <a:pPr algn="ctr"/>
+            <a:endParaRPr/>
+          </a:p>
+        </p:txBody>
+      </p:sp>
+      <p:sp>
+        <p:nvSpPr>
+          <p:cNvPr id="4" name="TextBox 3">
+            <a:extLst>
+              <a:ext uri="{FF2B5EF4-FFF2-40B4-BE49-F238E27FC236}">
+                <a16:creationId xmlns:a16="http://schemas.microsoft.com/office/drawing/2014/main" id="{D5CC4548-67E8-F388-B7AB-A0B9C4C32110}"/>
+              </a:ext>
+            </a:extLst>
+          </p:cNvPr>
+          <p:cNvSpPr txBox="1"/>
+          <p:nvPr/>
+        </p:nvSpPr>
+        <p:spPr>
+          <a:xfrm>
+            <a:off x="594360" y="320040"/>
+            <a:ext cx="689612" cy="477054"/>
+          </a:xfrm>
+          <a:prstGeom prst="rect">
+            <a:avLst/>
+          </a:prstGeom>
+          <a:noFill/>
+        </p:spPr>
+        <p:txBody>
+          <a:bodyPr wrap="none">
+            <a:spAutoFit/>
+          </a:bodyPr>
+          <a:lstStyle/>
+          <a:p>
+            <a:r>
+              <a:rPr sz="2500" b="1" dirty="0">
+                <a:solidFill>
+                  <a:srgbClr val="0F172A"/>
+                </a:solidFill>
+                <a:latin typeface="Aptos"/>
+              </a:rPr>
+              <a:t>1</a:t>
+            </a:r>
+            <a:r>
+              <a:rPr lang="pt-BR" sz="2500" b="1" dirty="0">
+                <a:solidFill>
+                  <a:srgbClr val="0F172A"/>
+                </a:solidFill>
+                <a:latin typeface="Aptos"/>
+              </a:rPr>
+              <a:t>5</a:t>
+            </a:r>
+            <a:r>
+              <a:rPr sz="2500" b="1" dirty="0">
+                <a:solidFill>
+                  <a:srgbClr val="0F172A"/>
+                </a:solidFill>
+                <a:latin typeface="Aptos"/>
+              </a:rPr>
+              <a:t>. </a:t>
+            </a:r>
+          </a:p>
+        </p:txBody>
+      </p:sp>
+      <p:sp>
+        <p:nvSpPr>
+          <p:cNvPr id="16" name="Rectangle 15">
+            <a:extLst>
+              <a:ext uri="{FF2B5EF4-FFF2-40B4-BE49-F238E27FC236}">
+                <a16:creationId xmlns:a16="http://schemas.microsoft.com/office/drawing/2014/main" id="{708E48E8-DB04-412C-A046-3E01F0EF5E47}"/>
+              </a:ext>
+            </a:extLst>
+          </p:cNvPr>
+          <p:cNvSpPr/>
+          <p:nvPr/>
+        </p:nvSpPr>
+        <p:spPr>
+          <a:xfrm>
+            <a:off x="594360" y="6473952"/>
+            <a:ext cx="10972800" cy="9144"/>
+          </a:xfrm>
+          <a:prstGeom prst="rect">
+            <a:avLst/>
+          </a:prstGeom>
+          <a:solidFill>
+            <a:srgbClr val="E2E8F0"/>
+          </a:solidFill>
+          <a:ln>
+            <a:noFill/>
+          </a:ln>
+        </p:spPr>
+        <p:style>
+          <a:lnRef idx="1">
+            <a:schemeClr val="accent1"/>
+          </a:lnRef>
+          <a:fillRef idx="3">
+            <a:schemeClr val="accent1"/>
+          </a:fillRef>
+          <a:effectRef idx="2">
+            <a:schemeClr val="accent1"/>
+          </a:effectRef>
+          <a:fontRef idx="minor">
+            <a:schemeClr val="lt1"/>
+          </a:fontRef>
+        </p:style>
+        <p:txBody>
+          <a:bodyPr rtlCol="0" anchor="ctr"/>
+          <a:lstStyle/>
+          <a:p>
+            <a:pPr algn="ctr"/>
+            <a:endParaRPr/>
+          </a:p>
+        </p:txBody>
+      </p:sp>
+      <p:sp>
+        <p:nvSpPr>
+          <p:cNvPr id="17" name="TextBox 16">
+            <a:extLst>
+              <a:ext uri="{FF2B5EF4-FFF2-40B4-BE49-F238E27FC236}">
+                <a16:creationId xmlns:a16="http://schemas.microsoft.com/office/drawing/2014/main" id="{5A3FCFDF-B3A2-E625-B2F4-B47FD3DB2B3D}"/>
+              </a:ext>
+            </a:extLst>
+          </p:cNvPr>
+          <p:cNvSpPr txBox="1"/>
+          <p:nvPr/>
+        </p:nvSpPr>
+        <p:spPr>
+          <a:xfrm>
+            <a:off x="594360" y="6510528"/>
+            <a:ext cx="9784080" cy="201168"/>
+          </a:xfrm>
+          <a:prstGeom prst="rect">
+            <a:avLst/>
+          </a:prstGeom>
+          <a:noFill/>
+        </p:spPr>
+        <p:txBody>
+          <a:bodyPr wrap="none">
+            <a:spAutoFit/>
+          </a:bodyPr>
+          <a:lstStyle/>
+          <a:p>
+            <a:r>
+              <a:rPr sz="800">
+                <a:solidFill>
+                  <a:srgbClr val="64748B"/>
+                </a:solidFill>
+                <a:latin typeface="Aptos"/>
+              </a:rPr>
+              <a:t>Engenharia de Dados + Big Data • eEDB-022/2026-3</a:t>
+            </a:r>
+          </a:p>
+        </p:txBody>
+      </p:sp>
+      <p:sp>
+        <p:nvSpPr>
+          <p:cNvPr id="18" name="TextBox 17">
+            <a:extLst>
+              <a:ext uri="{FF2B5EF4-FFF2-40B4-BE49-F238E27FC236}">
+                <a16:creationId xmlns:a16="http://schemas.microsoft.com/office/drawing/2014/main" id="{5D163CA0-FB06-0C28-EBDB-017D0577D04B}"/>
+              </a:ext>
+            </a:extLst>
+          </p:cNvPr>
+          <p:cNvSpPr txBox="1"/>
+          <p:nvPr/>
+        </p:nvSpPr>
+        <p:spPr>
+          <a:xfrm>
+            <a:off x="11260665" y="6492240"/>
+            <a:ext cx="306495" cy="230832"/>
+          </a:xfrm>
+          <a:prstGeom prst="rect">
+            <a:avLst/>
+          </a:prstGeom>
+          <a:noFill/>
+        </p:spPr>
+        <p:txBody>
+          <a:bodyPr wrap="none">
+            <a:spAutoFit/>
+          </a:bodyPr>
+          <a:lstStyle/>
+          <a:p>
+            <a:pPr algn="r"/>
+            <a:r>
+              <a:rPr lang="pt-BR" sz="900" b="1" dirty="0">
+                <a:solidFill>
+                  <a:srgbClr val="475569"/>
+                </a:solidFill>
+                <a:latin typeface="Aptos"/>
+              </a:rPr>
+              <a:t>16</a:t>
+            </a:r>
+            <a:endParaRPr sz="900" b="1" dirty="0">
+              <a:solidFill>
+                <a:srgbClr val="475569"/>
+              </a:solidFill>
+              <a:latin typeface="Aptos"/>
+            </a:endParaRPr>
+          </a:p>
+        </p:txBody>
+      </p:sp>
+      <p:pic>
+        <p:nvPicPr>
+          <p:cNvPr id="8" name="Imagem 7">
+            <a:extLst>
+              <a:ext uri="{FF2B5EF4-FFF2-40B4-BE49-F238E27FC236}">
+                <a16:creationId xmlns:a16="http://schemas.microsoft.com/office/drawing/2014/main" id="{9B121432-FC92-A67C-0408-79C3A711B439}"/>
+              </a:ext>
+            </a:extLst>
+          </p:cNvPr>
+          <p:cNvPicPr>
+            <a:picLocks noChangeAspect="1"/>
+          </p:cNvPicPr>
+          <p:nvPr/>
+        </p:nvPicPr>
+        <p:blipFill>
+          <a:blip r:embed="rId2"/>
+          <a:stretch>
+            <a:fillRect/>
+          </a:stretch>
+        </p:blipFill>
+        <p:spPr>
+          <a:xfrm>
+            <a:off x="1190989" y="350876"/>
+            <a:ext cx="10541542" cy="5918504"/>
+          </a:xfrm>
+          <a:prstGeom prst="rect">
+            <a:avLst/>
+          </a:prstGeom>
+        </p:spPr>
+      </p:pic>
+    </p:spTree>
+    <p:extLst>
+      <p:ext uri="{BB962C8B-B14F-4D97-AF65-F5344CB8AC3E}">
+        <p14:creationId xmlns:p14="http://schemas.microsoft.com/office/powerpoint/2010/main" val="2685523219"/>
+      </p:ext>
+    </p:extLst>
+  </p:cSld>
+  <p:clrMapOvr>
+    <a:masterClrMapping/>
+  </p:clrMapOvr>
+</p:sld>
+</file>
+
+<file path=ppt/slides/slide17.xml><?xml version="1.0" encoding="utf-8"?>
+<p:sld xmlns:a="http://schemas.openxmlformats.org/drawingml/2006/main" xmlns:r="http://schemas.openxmlformats.org/officeDocument/2006/relationships" xmlns:p="http://schemas.openxmlformats.org/presentationml/2006/main">
+  <p:cSld>
+    <p:spTree>
+      <p:nvGrpSpPr>
         <p:cNvPr id="1" name=""/>
         <p:cNvGrpSpPr/>
         <p:nvPr/>
@@ -8039,7 +8401,7 @@
                 </a:solidFill>
                 <a:latin typeface="Aptos"/>
               </a:rPr>
-              <a:t>5</a:t>
+              <a:t>6</a:t>
             </a:r>
             <a:r>
               <a:rPr sz="2500" b="1" dirty="0">
@@ -8449,7 +8811,7 @@
                 </a:solidFill>
                 <a:latin typeface="Aptos"/>
               </a:rPr>
-              <a:t>16</a:t>
+              <a:t>17</a:t>
             </a:r>
             <a:endParaRPr sz="900" b="1" dirty="0">
               <a:solidFill>
